--- a/assets/demos/demo-agent-slides-ko.pptx
+++ b/assets/demos/demo-agent-slides-ko.pptx
@@ -3168,7 +3168,7 @@
                 <a:solidFill>
                   <a:srgbClr val="141413"/>
                 </a:solidFill>
-                <a:latin typeface="NanumMyeongjo"/>
+                <a:latin typeface="Source Han Serif K"/>
               </a:rPr>
               <a:t>{{문서 제목}}</a:t>
             </a:r>
@@ -3238,7 +3238,7 @@
                 <a:solidFill>
                   <a:srgbClr val="504E49"/>
                 </a:solidFill>
-                <a:latin typeface="NanumMyeongjo"/>
+                <a:latin typeface="Source Han Serif K"/>
               </a:rPr>
               <a:t>{{한 줄 설명}}</a:t>
             </a:r>
@@ -3273,7 +3273,7 @@
                 <a:solidFill>
                   <a:srgbClr val="6B6A64"/>
                 </a:solidFill>
-                <a:latin typeface="NanumMyeongjo"/>
+                <a:latin typeface="Source Han Serif K"/>
               </a:rPr>
               <a:t>{{작성자}} · 2026.04</a:t>
             </a:r>
@@ -3370,7 +3370,7 @@
                 <a:solidFill>
                   <a:srgbClr val="141413"/>
                 </a:solidFill>
-                <a:latin typeface="NanumMyeongjo"/>
+                <a:latin typeface="Source Han Serif K"/>
               </a:rPr>
               <a:t>목차</a:t>
             </a:r>
@@ -3440,7 +3440,7 @@
                 <a:solidFill>
                   <a:srgbClr val="1B365D"/>
                 </a:solidFill>
-                <a:latin typeface="NanumMyeongjo"/>
+                <a:latin typeface="Source Han Serif K"/>
               </a:rPr>
               <a:t>01</a:t>
             </a:r>
@@ -3475,7 +3475,7 @@
                 <a:solidFill>
                   <a:srgbClr val="141413"/>
                 </a:solidFill>
-                <a:latin typeface="NanumMyeongjo"/>
+                <a:latin typeface="Source Han Serif K"/>
               </a:rPr>
               <a:t>{{1장}}</a:t>
             </a:r>
@@ -3510,7 +3510,7 @@
                 <a:solidFill>
                   <a:srgbClr val="1B365D"/>
                 </a:solidFill>
-                <a:latin typeface="NanumMyeongjo"/>
+                <a:latin typeface="Source Han Serif K"/>
               </a:rPr>
               <a:t>02</a:t>
             </a:r>
@@ -3545,7 +3545,7 @@
                 <a:solidFill>
                   <a:srgbClr val="141413"/>
                 </a:solidFill>
-                <a:latin typeface="NanumMyeongjo"/>
+                <a:latin typeface="Source Han Serif K"/>
               </a:rPr>
               <a:t>{{2장}}</a:t>
             </a:r>
@@ -3580,7 +3580,7 @@
                 <a:solidFill>
                   <a:srgbClr val="1B365D"/>
                 </a:solidFill>
-                <a:latin typeface="NanumMyeongjo"/>
+                <a:latin typeface="Source Han Serif K"/>
               </a:rPr>
               <a:t>03</a:t>
             </a:r>
@@ -3615,7 +3615,7 @@
                 <a:solidFill>
                   <a:srgbClr val="141413"/>
                 </a:solidFill>
-                <a:latin typeface="NanumMyeongjo"/>
+                <a:latin typeface="Source Han Serif K"/>
               </a:rPr>
               <a:t>{{3장}}</a:t>
             </a:r>
@@ -3650,7 +3650,7 @@
                 <a:solidFill>
                   <a:srgbClr val="1B365D"/>
                 </a:solidFill>
-                <a:latin typeface="NanumMyeongjo"/>
+                <a:latin typeface="Source Han Serif K"/>
               </a:rPr>
               <a:t>04</a:t>
             </a:r>
@@ -3685,7 +3685,7 @@
                 <a:solidFill>
                   <a:srgbClr val="141413"/>
                 </a:solidFill>
-                <a:latin typeface="NanumMyeongjo"/>
+                <a:latin typeface="Source Han Serif K"/>
               </a:rPr>
               <a:t>Q&amp;A</a:t>
             </a:r>
@@ -3782,7 +3782,7 @@
                 <a:solidFill>
                   <a:srgbClr val="FFFFFF"/>
                 </a:solidFill>
-                <a:latin typeface="NanumMyeongjo"/>
+                <a:latin typeface="Source Han Serif K"/>
               </a:rPr>
               <a:t>01</a:t>
             </a:r>
@@ -3817,7 +3817,7 @@
                 <a:solidFill>
                   <a:srgbClr val="FFFFFF"/>
                 </a:solidFill>
-                <a:latin typeface="NanumMyeongjo"/>
+                <a:latin typeface="Source Han Serif K"/>
               </a:rPr>
               <a:t>{{장 제목}}</a:t>
             </a:r>
@@ -3914,7 +3914,7 @@
                 <a:solidFill>
                   <a:srgbClr val="6B6A64"/>
                 </a:solidFill>
-                <a:latin typeface="NanumMyeongjo"/>
+                <a:latin typeface="Source Han Serif K"/>
               </a:rPr>
               <a:t>{{장 · 이 페이지}}</a:t>
             </a:r>
@@ -3949,7 +3949,7 @@
                 <a:solidFill>
                   <a:srgbClr val="141413"/>
                 </a:solidFill>
-                <a:latin typeface="NanumMyeongjo"/>
+                <a:latin typeface="Source Han Serif K"/>
               </a:rPr>
               <a:t>{{한 문장으로 정리한 핵심 주장}}</a:t>
             </a:r>
@@ -3984,7 +3984,7 @@
                 <a:solidFill>
                   <a:srgbClr val="3D3D3A"/>
                 </a:solidFill>
-                <a:latin typeface="NanumMyeongjo"/>
+                <a:latin typeface="Source Han Serif K"/>
               </a:rPr>
               <a:t>{{18pt 본문 한 단락. 3줄 이내로 유지. 한 슬라이드, 하나의 핵심 메시지. 독자의 주의력이 가장 희소한 자원.}}</a:t>
             </a:r>
@@ -4019,7 +4019,7 @@
                 <a:solidFill>
                   <a:srgbClr val="6B6A64"/>
                 </a:solidFill>
-                <a:latin typeface="NanumMyeongjo"/>
+                <a:latin typeface="Source Han Serif K"/>
               </a:rPr>
               <a:t> - 05</a:t>
             </a:r>
@@ -4116,7 +4116,7 @@
                 <a:solidFill>
                   <a:srgbClr val="141413"/>
                 </a:solidFill>
-                <a:latin typeface="NanumMyeongjo"/>
+                <a:latin typeface="Source Han Serif K"/>
               </a:rPr>
               <a:t>핵심 결과</a:t>
             </a:r>
@@ -4186,7 +4186,7 @@
                 <a:solidFill>
                   <a:srgbClr val="1B365D"/>
                 </a:solidFill>
-                <a:latin typeface="NanumMyeongjo"/>
+                <a:latin typeface="Source Han Serif K"/>
               </a:rPr>
               <a:t>+42%</a:t>
             </a:r>
@@ -4221,7 +4221,7 @@
                 <a:solidFill>
                   <a:srgbClr val="504E49"/>
                 </a:solidFill>
-                <a:latin typeface="NanumMyeongjo"/>
+                <a:latin typeface="Source Han Serif K"/>
               </a:rPr>
               <a:t>전환율 상승</a:t>
             </a:r>
@@ -4256,7 +4256,7 @@
                 <a:solidFill>
                   <a:srgbClr val="1B365D"/>
                 </a:solidFill>
-                <a:latin typeface="NanumMyeongjo"/>
+                <a:latin typeface="Source Han Serif K"/>
               </a:rPr>
               <a:t>3.8M</a:t>
             </a:r>
@@ -4291,7 +4291,7 @@
                 <a:solidFill>
                   <a:srgbClr val="504E49"/>
                 </a:solidFill>
-                <a:latin typeface="NanumMyeongjo"/>
+                <a:latin typeface="Source Han Serif K"/>
               </a:rPr>
               <a:t>월간 활성 사용자</a:t>
             </a:r>
@@ -4326,7 +4326,7 @@
                 <a:solidFill>
                   <a:srgbClr val="1B365D"/>
                 </a:solidFill>
-                <a:latin typeface="NanumMyeongjo"/>
+                <a:latin typeface="Source Han Serif K"/>
               </a:rPr>
               <a:t>99.9%</a:t>
             </a:r>
@@ -4361,7 +4361,7 @@
                 <a:solidFill>
                   <a:srgbClr val="504E49"/>
                 </a:solidFill>
-                <a:latin typeface="NanumMyeongjo"/>
+                <a:latin typeface="Source Han Serif K"/>
               </a:rPr>
               <a:t>가용성 SLA</a:t>
             </a:r>
@@ -4396,7 +4396,7 @@
                 <a:solidFill>
                   <a:srgbClr val="1B365D"/>
                 </a:solidFill>
-                <a:latin typeface="NanumMyeongjo"/>
+                <a:latin typeface="Source Han Serif K"/>
               </a:rPr>
               <a:t>5,000+</a:t>
             </a:r>
@@ -4431,7 +4431,7 @@
                 <a:solidFill>
                   <a:srgbClr val="504E49"/>
                 </a:solidFill>
-                <a:latin typeface="NanumMyeongjo"/>
+                <a:latin typeface="Source Han Serif K"/>
               </a:rPr>
               <a:t>최대 QPS</a:t>
             </a:r>
@@ -4528,7 +4528,7 @@
                 <a:solidFill>
                   <a:srgbClr val="141413"/>
                 </a:solidFill>
-                <a:latin typeface="NanumMyeongjo"/>
+                <a:latin typeface="Source Han Serif K"/>
               </a:rPr>
               <a:t>“Good design is as little design as possible.”</a:t>
             </a:r>
@@ -4563,7 +4563,7 @@
                 <a:solidFill>
                   <a:srgbClr val="504E49"/>
                 </a:solidFill>
-                <a:latin typeface="NanumMyeongjo"/>
+                <a:latin typeface="Source Han Serif K"/>
               </a:rPr>
               <a:t> - Dieter Rams</a:t>
             </a:r>
@@ -4660,7 +4660,7 @@
                 <a:solidFill>
                   <a:srgbClr val="6B6A64"/>
                 </a:solidFill>
-                <a:latin typeface="NanumMyeongjo"/>
+                <a:latin typeface="Source Han Serif K"/>
               </a:rPr>
               <a:t>{{장 · 비교}}</a:t>
             </a:r>
@@ -4730,7 +4730,7 @@
                 <a:solidFill>
                   <a:srgbClr val="504E49"/>
                 </a:solidFill>
-                <a:latin typeface="NanumMyeongjo"/>
+                <a:latin typeface="Source Han Serif K"/>
               </a:rPr>
               <a:t>{{Before}}</a:t>
             </a:r>
@@ -4765,7 +4765,7 @@
                 <a:solidFill>
                   <a:srgbClr val="141413"/>
                 </a:solidFill>
-                <a:latin typeface="NanumMyeongjo"/>
+                <a:latin typeface="Source Han Serif K"/>
               </a:rPr>
               <a:t>{{After}}</a:t>
             </a:r>
@@ -4835,7 +4835,7 @@
                 <a:solidFill>
                   <a:srgbClr val="6B6A64"/>
                 </a:solidFill>
-                <a:latin typeface="NanumMyeongjo"/>
+                <a:latin typeface="Source Han Serif K"/>
               </a:rPr>
               <a:t>{{포인트 A}}</a:t>
             </a:r>
@@ -4870,7 +4870,7 @@
                 <a:solidFill>
                   <a:srgbClr val="6B6A64"/>
                 </a:solidFill>
-                <a:latin typeface="NanumMyeongjo"/>
+                <a:latin typeface="Source Han Serif K"/>
               </a:rPr>
               <a:t>{{포인트 B}}</a:t>
             </a:r>
@@ -4905,7 +4905,7 @@
                 <a:solidFill>
                   <a:srgbClr val="6B6A64"/>
                 </a:solidFill>
-                <a:latin typeface="NanumMyeongjo"/>
+                <a:latin typeface="Source Han Serif K"/>
               </a:rPr>
               <a:t>{{포인트 C}}</a:t>
             </a:r>
@@ -4940,7 +4940,7 @@
                 <a:solidFill>
                   <a:srgbClr val="3D3D3A"/>
                 </a:solidFill>
-                <a:latin typeface="NanumMyeongjo"/>
+                <a:latin typeface="Source Han Serif K"/>
               </a:rPr>
               <a:t>{{개선 A}}</a:t>
             </a:r>
@@ -4975,7 +4975,7 @@
                 <a:solidFill>
                   <a:srgbClr val="3D3D3A"/>
                 </a:solidFill>
-                <a:latin typeface="NanumMyeongjo"/>
+                <a:latin typeface="Source Han Serif K"/>
               </a:rPr>
               <a:t>{{개선 B}}</a:t>
             </a:r>
@@ -5010,7 +5010,7 @@
                 <a:solidFill>
                   <a:srgbClr val="3D3D3A"/>
                 </a:solidFill>
-                <a:latin typeface="NanumMyeongjo"/>
+                <a:latin typeface="Source Han Serif K"/>
               </a:rPr>
               <a:t>{{개선 C}}</a:t>
             </a:r>
@@ -5045,7 +5045,7 @@
                 <a:solidFill>
                   <a:srgbClr val="6B6A64"/>
                 </a:solidFill>
-                <a:latin typeface="NanumMyeongjo"/>
+                <a:latin typeface="Source Han Serif K"/>
               </a:rPr>
               <a:t> - 08</a:t>
             </a:r>
@@ -5142,7 +5142,7 @@
                 <a:solidFill>
                   <a:srgbClr val="6B6A64"/>
                 </a:solidFill>
-                <a:latin typeface="NanumMyeongjo"/>
+                <a:latin typeface="Source Han Serif K"/>
               </a:rPr>
               <a:t>{{장 · 프로세스}}</a:t>
             </a:r>
@@ -5177,7 +5177,7 @@
                 <a:solidFill>
                   <a:srgbClr val="141413"/>
                 </a:solidFill>
-                <a:latin typeface="NanumMyeongjo"/>
+                <a:latin typeface="Source Han Serif K"/>
               </a:rPr>
               <a:t>{{프로세스를 단정형으로 정리한 헤드라인}}</a:t>
             </a:r>
@@ -5247,7 +5247,7 @@
                 <a:solidFill>
                   <a:srgbClr val="1B365D"/>
                 </a:solidFill>
-                <a:latin typeface="NanumMyeongjo"/>
+                <a:latin typeface="Source Han Serif K"/>
               </a:rPr>
               <a:t>01</a:t>
             </a:r>
@@ -5282,7 +5282,7 @@
                 <a:solidFill>
                   <a:srgbClr val="141413"/>
                 </a:solidFill>
-                <a:latin typeface="NanumMyeongjo"/>
+                <a:latin typeface="Source Han Serif K"/>
               </a:rPr>
               <a:t>{{1단계}}</a:t>
             </a:r>
@@ -5317,7 +5317,7 @@
                 <a:solidFill>
                   <a:srgbClr val="504E49"/>
                 </a:solidFill>
-                <a:latin typeface="NanumMyeongjo"/>
+                <a:latin typeface="Source Han Serif K"/>
               </a:rPr>
               <a:t>{{1단계 짧은 설명. 2줄 이내.}}</a:t>
             </a:r>
@@ -5352,7 +5352,7 @@
                 <a:solidFill>
                   <a:srgbClr val="1B365D"/>
                 </a:solidFill>
-                <a:latin typeface="NanumMyeongjo"/>
+                <a:latin typeface="Source Han Serif K"/>
               </a:rPr>
               <a:t>02</a:t>
             </a:r>
@@ -5387,7 +5387,7 @@
                 <a:solidFill>
                   <a:srgbClr val="141413"/>
                 </a:solidFill>
-                <a:latin typeface="NanumMyeongjo"/>
+                <a:latin typeface="Source Han Serif K"/>
               </a:rPr>
               <a:t>{{2단계}}</a:t>
             </a:r>
@@ -5422,7 +5422,7 @@
                 <a:solidFill>
                   <a:srgbClr val="504E49"/>
                 </a:solidFill>
-                <a:latin typeface="NanumMyeongjo"/>
+                <a:latin typeface="Source Han Serif K"/>
               </a:rPr>
               <a:t>{{2단계 짧은 설명. 2줄 이내.}}</a:t>
             </a:r>
@@ -5457,7 +5457,7 @@
                 <a:solidFill>
                   <a:srgbClr val="1B365D"/>
                 </a:solidFill>
-                <a:latin typeface="NanumMyeongjo"/>
+                <a:latin typeface="Source Han Serif K"/>
               </a:rPr>
               <a:t>03</a:t>
             </a:r>
@@ -5492,7 +5492,7 @@
                 <a:solidFill>
                   <a:srgbClr val="141413"/>
                 </a:solidFill>
-                <a:latin typeface="NanumMyeongjo"/>
+                <a:latin typeface="Source Han Serif K"/>
               </a:rPr>
               <a:t>{{3단계}}</a:t>
             </a:r>
@@ -5527,7 +5527,7 @@
                 <a:solidFill>
                   <a:srgbClr val="504E49"/>
                 </a:solidFill>
-                <a:latin typeface="NanumMyeongjo"/>
+                <a:latin typeface="Source Han Serif K"/>
               </a:rPr>
               <a:t>{{3단계 짧은 설명. 2줄 이내.}}</a:t>
             </a:r>
@@ -5562,7 +5562,7 @@
                 <a:solidFill>
                   <a:srgbClr val="6B6A64"/>
                 </a:solidFill>
-                <a:latin typeface="NanumMyeongjo"/>
+                <a:latin typeface="Source Han Serif K"/>
               </a:rPr>
               <a:t> - 09</a:t>
             </a:r>
@@ -5659,7 +5659,7 @@
                 <a:solidFill>
                   <a:srgbClr val="141413"/>
                 </a:solidFill>
-                <a:latin typeface="NanumMyeongjo"/>
+                <a:latin typeface="Source Han Serif K"/>
               </a:rPr>
               <a:t>감사합니다</a:t>
             </a:r>
@@ -5729,7 +5729,7 @@
                 <a:solidFill>
                   <a:srgbClr val="504E49"/>
                 </a:solidFill>
-                <a:latin typeface="NanumMyeongjo"/>
+                <a:latin typeface="Source Han Serif K"/>
               </a:rPr>
               <a:t>{{이메일}} · {{웹사이트}}</a:t>
             </a:r>
